--- a/02-product-case-studies/convva-sme-commerce/Deck/Executive_Deck.pptx
+++ b/02-product-case-studies/convva-sme-commerce/Deck/Executive_Deck.pptx
@@ -1391,7 +1391,7 @@
     <p:bg>
       <p:bgPr>
         <a:solidFill>
-          <a:srgbClr val="15253D"/>
+          <a:srgbClr val="0B132B"/>
         </a:solidFill>
       </p:bgPr>
     </p:bg>
@@ -1436,7 +1436,7 @@
             <a:r>
               <a:rPr lang="en-US" sz="1300" b="1" spc="200" kern="0" dirty="0">
                 <a:solidFill>
-                  <a:srgbClr val="5EEAD4"/>
+                  <a:srgbClr val="60A5FA"/>
                 </a:solidFill>
                 <a:latin typeface="Arial" pitchFamily="34" charset="0"/>
                 <a:ea typeface="Arial" pitchFamily="34" charset="-122"/>
@@ -1457,7 +1457,7 @@
         <p:spPr>
           <a:xfrm>
             <a:off x="731520" y="1645920"/>
-            <a:ext cx="10515600" cy="1463040"/>
+            <a:ext cx="7437120" cy="1463040"/>
           </a:xfrm>
           <a:prstGeom prst="rect">
             <a:avLst/>
@@ -1543,7 +1543,7 @@
           <a:noFill/>
           <a:ln w="25400">
             <a:solidFill>
-              <a:srgbClr val="5EEAD4"/>
+              <a:srgbClr val="60A5FA"/>
             </a:solidFill>
             <a:prstDash val="solid"/>
           </a:ln>
@@ -1682,6 +1682,74 @@
           </a:p>
         </p:txBody>
       </p:sp>
+      <p:pic>
+        <p:nvPicPr>
+          <p:cNvPr id="7" name="Picture 6" descr="convva-primary-reverse.png"/>
+          <p:cNvPicPr>
+            <a:picLocks noChangeAspect="1"/>
+          </p:cNvPicPr>
+          <p:nvPr/>
+        </p:nvPicPr>
+        <p:blipFill>
+          <a:blip r:embed="rId3"/>
+          <a:stretch>
+            <a:fillRect/>
+          </a:stretch>
+        </p:blipFill>
+        <p:spPr>
+          <a:xfrm>
+            <a:off x="8534400" y="556768"/>
+            <a:ext cx="3108960" cy="898144"/>
+          </a:xfrm>
+          <a:prstGeom prst="rect">
+            <a:avLst/>
+          </a:prstGeom>
+        </p:spPr>
+      </p:pic>
+      <p:sp>
+        <p:nvSpPr>
+          <p:cNvPr id="8" name="Rectangle 7"/>
+          <p:cNvSpPr/>
+          <p:nvPr/>
+        </p:nvSpPr>
+        <p:spPr>
+          <a:xfrm>
+            <a:off x="0" y="6693408"/>
+            <a:ext cx="12192000" cy="164592"/>
+          </a:xfrm>
+          <a:prstGeom prst="rect">
+            <a:avLst/>
+          </a:prstGeom>
+          <a:solidFill>
+            <a:srgbClr val="60A5FA"/>
+          </a:solidFill>
+          <a:ln>
+            <a:noFill/>
+          </a:ln>
+          <a:effectLst/>
+        </p:spPr>
+        <p:style>
+          <a:lnRef idx="1">
+            <a:schemeClr val="accent1"/>
+          </a:lnRef>
+          <a:fillRef idx="3">
+            <a:schemeClr val="accent1"/>
+          </a:fillRef>
+          <a:effectRef idx="2">
+            <a:schemeClr val="accent1"/>
+          </a:effectRef>
+          <a:fontRef idx="minor">
+            <a:schemeClr val="lt1"/>
+          </a:fontRef>
+        </p:style>
+        <p:txBody>
+          <a:bodyPr rtlCol="0" anchor="ctr"/>
+          <a:lstStyle/>
+          <a:p>
+            <a:pPr algn="ctr"/>
+          </a:p>
+        </p:txBody>
+      </p:sp>
     </p:spTree>
   </p:cSld>
   <p:clrMapOvr>
@@ -1741,7 +1809,7 @@
             <a:r>
               <a:rPr lang="en-US" sz="2600" b="1" dirty="0">
                 <a:solidFill>
-                  <a:srgbClr val="15253D"/>
+                  <a:srgbClr val="0B132B"/>
                 </a:solidFill>
                 <a:latin typeface="Arial" pitchFamily="34" charset="0"/>
                 <a:ea typeface="Arial" pitchFamily="34" charset="-122"/>
@@ -1768,11 +1836,11 @@
             <a:avLst/>
           </a:prstGeom>
           <a:solidFill>
-            <a:srgbClr val="F4F7FB"/>
+            <a:srgbClr val="F3F7FE"/>
           </a:solidFill>
           <a:ln w="12700">
             <a:solidFill>
-              <a:srgbClr val="F4F7FB"/>
+              <a:srgbClr val="F3F7FE"/>
             </a:solidFill>
             <a:prstDash val="solid"/>
           </a:ln>
@@ -1805,7 +1873,7 @@
             <a:r>
               <a:rPr lang="en-US" sz="1400" b="1" dirty="0">
                 <a:solidFill>
-                  <a:srgbClr val="0F766E"/>
+                  <a:srgbClr val="1D4ED8"/>
                 </a:solidFill>
                 <a:latin typeface="Arial" pitchFamily="34" charset="0"/>
                 <a:ea typeface="Arial" pitchFamily="34" charset="-122"/>
@@ -1883,7 +1951,7 @@
             <a:r>
               <a:rPr lang="en-US" sz="1400" b="1" dirty="0">
                 <a:solidFill>
-                  <a:srgbClr val="0F766E"/>
+                  <a:srgbClr val="1D4ED8"/>
                 </a:solidFill>
                 <a:latin typeface="Arial" pitchFamily="34" charset="0"/>
                 <a:ea typeface="Arial" pitchFamily="34" charset="-122"/>
@@ -1910,11 +1978,11 @@
             <a:avLst/>
           </a:prstGeom>
           <a:solidFill>
-            <a:srgbClr val="EA580C"/>
+            <a:srgbClr val="2563EB"/>
           </a:solidFill>
           <a:ln w="12700">
             <a:solidFill>
-              <a:srgbClr val="EA580C"/>
+              <a:srgbClr val="2563EB"/>
             </a:solidFill>
             <a:prstDash val="solid"/>
           </a:ln>
@@ -2013,11 +2081,11 @@
             <a:avLst/>
           </a:prstGeom>
           <a:solidFill>
-            <a:srgbClr val="EA580C"/>
+            <a:srgbClr val="2563EB"/>
           </a:solidFill>
           <a:ln w="12700">
             <a:solidFill>
-              <a:srgbClr val="EA580C"/>
+              <a:srgbClr val="2563EB"/>
             </a:solidFill>
             <a:prstDash val="solid"/>
           </a:ln>
@@ -2116,11 +2184,11 @@
             <a:avLst/>
           </a:prstGeom>
           <a:solidFill>
-            <a:srgbClr val="EA580C"/>
+            <a:srgbClr val="2563EB"/>
           </a:solidFill>
           <a:ln w="12700">
             <a:solidFill>
-              <a:srgbClr val="EA580C"/>
+              <a:srgbClr val="2563EB"/>
             </a:solidFill>
             <a:prstDash val="solid"/>
           </a:ln>
@@ -2282,6 +2350,118 @@
           </a:p>
         </p:txBody>
       </p:sp>
+      <p:sp>
+        <p:nvSpPr>
+          <p:cNvPr id="18" name="Rectangle 17"/>
+          <p:cNvSpPr/>
+          <p:nvPr/>
+        </p:nvSpPr>
+        <p:spPr>
+          <a:xfrm>
+            <a:off x="0" y="0"/>
+            <a:ext cx="12192000" cy="82296"/>
+          </a:xfrm>
+          <a:prstGeom prst="rect">
+            <a:avLst/>
+          </a:prstGeom>
+          <a:solidFill>
+            <a:srgbClr val="0B132B"/>
+          </a:solidFill>
+          <a:ln>
+            <a:noFill/>
+          </a:ln>
+          <a:effectLst/>
+        </p:spPr>
+        <p:style>
+          <a:lnRef idx="1">
+            <a:schemeClr val="accent1"/>
+          </a:lnRef>
+          <a:fillRef idx="3">
+            <a:schemeClr val="accent1"/>
+          </a:fillRef>
+          <a:effectRef idx="2">
+            <a:schemeClr val="accent1"/>
+          </a:effectRef>
+          <a:fontRef idx="minor">
+            <a:schemeClr val="lt1"/>
+          </a:fontRef>
+        </p:style>
+        <p:txBody>
+          <a:bodyPr rtlCol="0" anchor="ctr"/>
+          <a:lstStyle/>
+          <a:p>
+            <a:pPr algn="ctr"/>
+          </a:p>
+        </p:txBody>
+      </p:sp>
+      <p:sp>
+        <p:nvSpPr>
+          <p:cNvPr id="19" name="Rectangle 18"/>
+          <p:cNvSpPr/>
+          <p:nvPr/>
+        </p:nvSpPr>
+        <p:spPr>
+          <a:xfrm>
+            <a:off x="0" y="82296"/>
+            <a:ext cx="1463040" cy="45720"/>
+          </a:xfrm>
+          <a:prstGeom prst="rect">
+            <a:avLst/>
+          </a:prstGeom>
+          <a:solidFill>
+            <a:srgbClr val="2563EB"/>
+          </a:solidFill>
+          <a:ln>
+            <a:noFill/>
+          </a:ln>
+          <a:effectLst/>
+        </p:spPr>
+        <p:style>
+          <a:lnRef idx="1">
+            <a:schemeClr val="accent1"/>
+          </a:lnRef>
+          <a:fillRef idx="3">
+            <a:schemeClr val="accent1"/>
+          </a:fillRef>
+          <a:effectRef idx="2">
+            <a:schemeClr val="accent1"/>
+          </a:effectRef>
+          <a:fontRef idx="minor">
+            <a:schemeClr val="lt1"/>
+          </a:fontRef>
+        </p:style>
+        <p:txBody>
+          <a:bodyPr rtlCol="0" anchor="ctr"/>
+          <a:lstStyle/>
+          <a:p>
+            <a:pPr algn="ctr"/>
+          </a:p>
+        </p:txBody>
+      </p:sp>
+      <p:pic>
+        <p:nvPicPr>
+          <p:cNvPr id="20" name="Picture 19" descr="convva-primary.png"/>
+          <p:cNvPicPr>
+            <a:picLocks noChangeAspect="1"/>
+          </p:cNvPicPr>
+          <p:nvPr/>
+        </p:nvPicPr>
+        <p:blipFill>
+          <a:blip r:embed="rId3"/>
+          <a:stretch>
+            <a:fillRect/>
+          </a:stretch>
+        </p:blipFill>
+        <p:spPr>
+          <a:xfrm>
+            <a:off x="10363200" y="6383528"/>
+            <a:ext cx="1005839" cy="290576"/>
+          </a:xfrm>
+          <a:prstGeom prst="rect">
+            <a:avLst/>
+          </a:prstGeom>
+        </p:spPr>
+      </p:pic>
     </p:spTree>
   </p:cSld>
   <p:clrMapOvr>
@@ -2341,7 +2521,7 @@
             <a:r>
               <a:rPr lang="en-US" sz="2600" b="1" dirty="0">
                 <a:solidFill>
-                  <a:srgbClr val="15253D"/>
+                  <a:srgbClr val="0B132B"/>
                 </a:solidFill>
                 <a:latin typeface="Arial" pitchFamily="34" charset="0"/>
                 <a:ea typeface="Arial" pitchFamily="34" charset="-122"/>
@@ -2494,6 +2674,118 @@
           </a:p>
         </p:txBody>
       </p:sp>
+      <p:sp>
+        <p:nvSpPr>
+          <p:cNvPr id="7" name="Rectangle 6"/>
+          <p:cNvSpPr/>
+          <p:nvPr/>
+        </p:nvSpPr>
+        <p:spPr>
+          <a:xfrm>
+            <a:off x="0" y="0"/>
+            <a:ext cx="12192000" cy="82296"/>
+          </a:xfrm>
+          <a:prstGeom prst="rect">
+            <a:avLst/>
+          </a:prstGeom>
+          <a:solidFill>
+            <a:srgbClr val="0B132B"/>
+          </a:solidFill>
+          <a:ln>
+            <a:noFill/>
+          </a:ln>
+          <a:effectLst/>
+        </p:spPr>
+        <p:style>
+          <a:lnRef idx="1">
+            <a:schemeClr val="accent1"/>
+          </a:lnRef>
+          <a:fillRef idx="3">
+            <a:schemeClr val="accent1"/>
+          </a:fillRef>
+          <a:effectRef idx="2">
+            <a:schemeClr val="accent1"/>
+          </a:effectRef>
+          <a:fontRef idx="minor">
+            <a:schemeClr val="lt1"/>
+          </a:fontRef>
+        </p:style>
+        <p:txBody>
+          <a:bodyPr rtlCol="0" anchor="ctr"/>
+          <a:lstStyle/>
+          <a:p>
+            <a:pPr algn="ctr"/>
+          </a:p>
+        </p:txBody>
+      </p:sp>
+      <p:sp>
+        <p:nvSpPr>
+          <p:cNvPr id="8" name="Rectangle 7"/>
+          <p:cNvSpPr/>
+          <p:nvPr/>
+        </p:nvSpPr>
+        <p:spPr>
+          <a:xfrm>
+            <a:off x="0" y="82296"/>
+            <a:ext cx="1463040" cy="45720"/>
+          </a:xfrm>
+          <a:prstGeom prst="rect">
+            <a:avLst/>
+          </a:prstGeom>
+          <a:solidFill>
+            <a:srgbClr val="2563EB"/>
+          </a:solidFill>
+          <a:ln>
+            <a:noFill/>
+          </a:ln>
+          <a:effectLst/>
+        </p:spPr>
+        <p:style>
+          <a:lnRef idx="1">
+            <a:schemeClr val="accent1"/>
+          </a:lnRef>
+          <a:fillRef idx="3">
+            <a:schemeClr val="accent1"/>
+          </a:fillRef>
+          <a:effectRef idx="2">
+            <a:schemeClr val="accent1"/>
+          </a:effectRef>
+          <a:fontRef idx="minor">
+            <a:schemeClr val="lt1"/>
+          </a:fontRef>
+        </p:style>
+        <p:txBody>
+          <a:bodyPr rtlCol="0" anchor="ctr"/>
+          <a:lstStyle/>
+          <a:p>
+            <a:pPr algn="ctr"/>
+          </a:p>
+        </p:txBody>
+      </p:sp>
+      <p:pic>
+        <p:nvPicPr>
+          <p:cNvPr id="9" name="Picture 8" descr="convva-primary.png"/>
+          <p:cNvPicPr>
+            <a:picLocks noChangeAspect="1"/>
+          </p:cNvPicPr>
+          <p:nvPr/>
+        </p:nvPicPr>
+        <p:blipFill>
+          <a:blip r:embed="rId4"/>
+          <a:stretch>
+            <a:fillRect/>
+          </a:stretch>
+        </p:blipFill>
+        <p:spPr>
+          <a:xfrm>
+            <a:off x="10363200" y="6383528"/>
+            <a:ext cx="1005839" cy="290576"/>
+          </a:xfrm>
+          <a:prstGeom prst="rect">
+            <a:avLst/>
+          </a:prstGeom>
+        </p:spPr>
+      </p:pic>
     </p:spTree>
   </p:cSld>
   <p:clrMapOvr>
@@ -2553,7 +2845,7 @@
             <a:r>
               <a:rPr lang="en-US" sz="2600" b="1" dirty="0">
                 <a:solidFill>
-                  <a:srgbClr val="15253D"/>
+                  <a:srgbClr val="0B132B"/>
                 </a:solidFill>
                 <a:latin typeface="Arial" pitchFamily="34" charset="0"/>
                 <a:ea typeface="Arial" pitchFamily="34" charset="-122"/>
@@ -2706,6 +2998,118 @@
           </a:p>
         </p:txBody>
       </p:sp>
+      <p:sp>
+        <p:nvSpPr>
+          <p:cNvPr id="7" name="Rectangle 6"/>
+          <p:cNvSpPr/>
+          <p:nvPr/>
+        </p:nvSpPr>
+        <p:spPr>
+          <a:xfrm>
+            <a:off x="0" y="0"/>
+            <a:ext cx="12192000" cy="82296"/>
+          </a:xfrm>
+          <a:prstGeom prst="rect">
+            <a:avLst/>
+          </a:prstGeom>
+          <a:solidFill>
+            <a:srgbClr val="0B132B"/>
+          </a:solidFill>
+          <a:ln>
+            <a:noFill/>
+          </a:ln>
+          <a:effectLst/>
+        </p:spPr>
+        <p:style>
+          <a:lnRef idx="1">
+            <a:schemeClr val="accent1"/>
+          </a:lnRef>
+          <a:fillRef idx="3">
+            <a:schemeClr val="accent1"/>
+          </a:fillRef>
+          <a:effectRef idx="2">
+            <a:schemeClr val="accent1"/>
+          </a:effectRef>
+          <a:fontRef idx="minor">
+            <a:schemeClr val="lt1"/>
+          </a:fontRef>
+        </p:style>
+        <p:txBody>
+          <a:bodyPr rtlCol="0" anchor="ctr"/>
+          <a:lstStyle/>
+          <a:p>
+            <a:pPr algn="ctr"/>
+          </a:p>
+        </p:txBody>
+      </p:sp>
+      <p:sp>
+        <p:nvSpPr>
+          <p:cNvPr id="8" name="Rectangle 7"/>
+          <p:cNvSpPr/>
+          <p:nvPr/>
+        </p:nvSpPr>
+        <p:spPr>
+          <a:xfrm>
+            <a:off x="0" y="82296"/>
+            <a:ext cx="1463040" cy="45720"/>
+          </a:xfrm>
+          <a:prstGeom prst="rect">
+            <a:avLst/>
+          </a:prstGeom>
+          <a:solidFill>
+            <a:srgbClr val="2563EB"/>
+          </a:solidFill>
+          <a:ln>
+            <a:noFill/>
+          </a:ln>
+          <a:effectLst/>
+        </p:spPr>
+        <p:style>
+          <a:lnRef idx="1">
+            <a:schemeClr val="accent1"/>
+          </a:lnRef>
+          <a:fillRef idx="3">
+            <a:schemeClr val="accent1"/>
+          </a:fillRef>
+          <a:effectRef idx="2">
+            <a:schemeClr val="accent1"/>
+          </a:effectRef>
+          <a:fontRef idx="minor">
+            <a:schemeClr val="lt1"/>
+          </a:fontRef>
+        </p:style>
+        <p:txBody>
+          <a:bodyPr rtlCol="0" anchor="ctr"/>
+          <a:lstStyle/>
+          <a:p>
+            <a:pPr algn="ctr"/>
+          </a:p>
+        </p:txBody>
+      </p:sp>
+      <p:pic>
+        <p:nvPicPr>
+          <p:cNvPr id="9" name="Picture 8" descr="convva-primary.png"/>
+          <p:cNvPicPr>
+            <a:picLocks noChangeAspect="1"/>
+          </p:cNvPicPr>
+          <p:nvPr/>
+        </p:nvPicPr>
+        <p:blipFill>
+          <a:blip r:embed="rId4"/>
+          <a:stretch>
+            <a:fillRect/>
+          </a:stretch>
+        </p:blipFill>
+        <p:spPr>
+          <a:xfrm>
+            <a:off x="10363200" y="6383528"/>
+            <a:ext cx="1005839" cy="290576"/>
+          </a:xfrm>
+          <a:prstGeom prst="rect">
+            <a:avLst/>
+          </a:prstGeom>
+        </p:spPr>
+      </p:pic>
     </p:spTree>
   </p:cSld>
   <p:clrMapOvr>
@@ -2765,7 +3169,7 @@
             <a:r>
               <a:rPr lang="en-US" sz="2600" b="1" dirty="0">
                 <a:solidFill>
-                  <a:srgbClr val="15253D"/>
+                  <a:srgbClr val="0B132B"/>
                 </a:solidFill>
                 <a:latin typeface="Arial" pitchFamily="34" charset="0"/>
                 <a:ea typeface="Arial" pitchFamily="34" charset="-122"/>
@@ -2834,7 +3238,7 @@
                   <a:tcPr marL="109728" marR="109728" marT="109728" marB="109728" anchor="ctr">
                     <a:lnL w="9525" cap="flat" cmpd="sng" algn="ctr">
                       <a:solidFill>
-                        <a:srgbClr val="D5DDE8"/>
+                        <a:srgbClr val="D3E0F7"/>
                       </a:solidFill>
                       <a:prstDash val="solid"/>
                       <a:round/>
@@ -2843,7 +3247,7 @@
                     </a:lnL>
                     <a:lnR w="9525" cap="flat" cmpd="sng" algn="ctr">
                       <a:solidFill>
-                        <a:srgbClr val="D5DDE8"/>
+                        <a:srgbClr val="D3E0F7"/>
                       </a:solidFill>
                       <a:prstDash val="solid"/>
                       <a:round/>
@@ -2852,7 +3256,7 @@
                     </a:lnR>
                     <a:lnT w="9525" cap="flat" cmpd="sng" algn="ctr">
                       <a:solidFill>
-                        <a:srgbClr val="D5DDE8"/>
+                        <a:srgbClr val="D3E0F7"/>
                       </a:solidFill>
                       <a:prstDash val="solid"/>
                       <a:round/>
@@ -2861,7 +3265,7 @@
                     </a:lnT>
                     <a:lnB w="9525" cap="flat" cmpd="sng" algn="ctr">
                       <a:solidFill>
-                        <a:srgbClr val="D5DDE8"/>
+                        <a:srgbClr val="D3E0F7"/>
                       </a:solidFill>
                       <a:prstDash val="solid"/>
                       <a:round/>
@@ -2869,7 +3273,7 @@
                       <a:tailEnd type="none" w="med" len="med"/>
                     </a:lnB>
                     <a:solidFill>
-                      <a:srgbClr val="15253D"/>
+                      <a:srgbClr val="0B132B"/>
                     </a:solidFill>
                   </a:tcPr>
                 </a:tc>
@@ -2902,7 +3306,7 @@
                   <a:tcPr marL="109728" marR="109728" marT="109728" marB="109728" anchor="ctr">
                     <a:lnL w="9525" cap="flat" cmpd="sng" algn="ctr">
                       <a:solidFill>
-                        <a:srgbClr val="D5DDE8"/>
+                        <a:srgbClr val="D3E0F7"/>
                       </a:solidFill>
                       <a:prstDash val="solid"/>
                       <a:round/>
@@ -2911,7 +3315,7 @@
                     </a:lnL>
                     <a:lnR w="9525" cap="flat" cmpd="sng" algn="ctr">
                       <a:solidFill>
-                        <a:srgbClr val="D5DDE8"/>
+                        <a:srgbClr val="D3E0F7"/>
                       </a:solidFill>
                       <a:prstDash val="solid"/>
                       <a:round/>
@@ -2920,7 +3324,7 @@
                     </a:lnR>
                     <a:lnT w="9525" cap="flat" cmpd="sng" algn="ctr">
                       <a:solidFill>
-                        <a:srgbClr val="D5DDE8"/>
+                        <a:srgbClr val="D3E0F7"/>
                       </a:solidFill>
                       <a:prstDash val="solid"/>
                       <a:round/>
@@ -2929,7 +3333,7 @@
                     </a:lnT>
                     <a:lnB w="9525" cap="flat" cmpd="sng" algn="ctr">
                       <a:solidFill>
-                        <a:srgbClr val="D5DDE8"/>
+                        <a:srgbClr val="D3E0F7"/>
                       </a:solidFill>
                       <a:prstDash val="solid"/>
                       <a:round/>
@@ -2937,7 +3341,7 @@
                       <a:tailEnd type="none" w="med" len="med"/>
                     </a:lnB>
                     <a:solidFill>
-                      <a:srgbClr val="15253D"/>
+                      <a:srgbClr val="0B132B"/>
                     </a:solidFill>
                   </a:tcPr>
                 </a:tc>
@@ -2970,7 +3374,7 @@
                   <a:tcPr marL="109728" marR="109728" marT="109728" marB="109728" anchor="ctr">
                     <a:lnL w="9525" cap="flat" cmpd="sng" algn="ctr">
                       <a:solidFill>
-                        <a:srgbClr val="D5DDE8"/>
+                        <a:srgbClr val="D3E0F7"/>
                       </a:solidFill>
                       <a:prstDash val="solid"/>
                       <a:round/>
@@ -2979,7 +3383,7 @@
                     </a:lnL>
                     <a:lnR w="9525" cap="flat" cmpd="sng" algn="ctr">
                       <a:solidFill>
-                        <a:srgbClr val="D5DDE8"/>
+                        <a:srgbClr val="D3E0F7"/>
                       </a:solidFill>
                       <a:prstDash val="solid"/>
                       <a:round/>
@@ -2988,7 +3392,7 @@
                     </a:lnR>
                     <a:lnT w="9525" cap="flat" cmpd="sng" algn="ctr">
                       <a:solidFill>
-                        <a:srgbClr val="D5DDE8"/>
+                        <a:srgbClr val="D3E0F7"/>
                       </a:solidFill>
                       <a:prstDash val="solid"/>
                       <a:round/>
@@ -2997,7 +3401,7 @@
                     </a:lnT>
                     <a:lnB w="9525" cap="flat" cmpd="sng" algn="ctr">
                       <a:solidFill>
-                        <a:srgbClr val="D5DDE8"/>
+                        <a:srgbClr val="D3E0F7"/>
                       </a:solidFill>
                       <a:prstDash val="solid"/>
                       <a:round/>
@@ -3005,7 +3409,7 @@
                       <a:tailEnd type="none" w="med" len="med"/>
                     </a:lnB>
                     <a:solidFill>
-                      <a:srgbClr val="15253D"/>
+                      <a:srgbClr val="0B132B"/>
                     </a:solidFill>
                   </a:tcPr>
                 </a:tc>
@@ -3022,7 +3426,7 @@
                       <a:r>
                         <a:rPr lang="en-US" sz="1500" b="1" dirty="0">
                           <a:solidFill>
-                            <a:srgbClr val="0F766E"/>
+                            <a:srgbClr val="1D4ED8"/>
                           </a:solidFill>
                           <a:latin typeface="Arial" pitchFamily="34" charset="0"/>
                           <a:ea typeface="Arial" pitchFamily="34" charset="-122"/>
@@ -3040,7 +3444,7 @@
                   <a:tcPr marL="109728" marR="109728" marT="109728" marB="109728" anchor="ctr">
                     <a:lnL w="9525" cap="flat" cmpd="sng" algn="ctr">
                       <a:solidFill>
-                        <a:srgbClr val="D5DDE8"/>
+                        <a:srgbClr val="D3E0F7"/>
                       </a:solidFill>
                       <a:prstDash val="solid"/>
                       <a:round/>
@@ -3049,7 +3453,7 @@
                     </a:lnL>
                     <a:lnR w="9525" cap="flat" cmpd="sng" algn="ctr">
                       <a:solidFill>
-                        <a:srgbClr val="D5DDE8"/>
+                        <a:srgbClr val="D3E0F7"/>
                       </a:solidFill>
                       <a:prstDash val="solid"/>
                       <a:round/>
@@ -3058,7 +3462,7 @@
                     </a:lnR>
                     <a:lnT w="9525" cap="flat" cmpd="sng" algn="ctr">
                       <a:solidFill>
-                        <a:srgbClr val="D5DDE8"/>
+                        <a:srgbClr val="D3E0F7"/>
                       </a:solidFill>
                       <a:prstDash val="solid"/>
                       <a:round/>
@@ -3067,7 +3471,7 @@
                     </a:lnT>
                     <a:lnB w="9525" cap="flat" cmpd="sng" algn="ctr">
                       <a:solidFill>
-                        <a:srgbClr val="D5DDE8"/>
+                        <a:srgbClr val="D3E0F7"/>
                       </a:solidFill>
                       <a:prstDash val="solid"/>
                       <a:round/>
@@ -3075,7 +3479,7 @@
                       <a:tailEnd type="none" w="med" len="med"/>
                     </a:lnB>
                     <a:solidFill>
-                      <a:srgbClr val="F4F7FB"/>
+                      <a:srgbClr val="F3F7FE"/>
                     </a:solidFill>
                   </a:tcPr>
                 </a:tc>
@@ -3108,7 +3512,7 @@
                   <a:tcPr marL="109728" marR="109728" marT="109728" marB="109728" anchor="ctr">
                     <a:lnL w="9525" cap="flat" cmpd="sng" algn="ctr">
                       <a:solidFill>
-                        <a:srgbClr val="D5DDE8"/>
+                        <a:srgbClr val="D3E0F7"/>
                       </a:solidFill>
                       <a:prstDash val="solid"/>
                       <a:round/>
@@ -3117,7 +3521,7 @@
                     </a:lnL>
                     <a:lnR w="9525" cap="flat" cmpd="sng" algn="ctr">
                       <a:solidFill>
-                        <a:srgbClr val="D5DDE8"/>
+                        <a:srgbClr val="D3E0F7"/>
                       </a:solidFill>
                       <a:prstDash val="solid"/>
                       <a:round/>
@@ -3126,7 +3530,7 @@
                     </a:lnR>
                     <a:lnT w="9525" cap="flat" cmpd="sng" algn="ctr">
                       <a:solidFill>
-                        <a:srgbClr val="D5DDE8"/>
+                        <a:srgbClr val="D3E0F7"/>
                       </a:solidFill>
                       <a:prstDash val="solid"/>
                       <a:round/>
@@ -3135,7 +3539,7 @@
                     </a:lnT>
                     <a:lnB w="9525" cap="flat" cmpd="sng" algn="ctr">
                       <a:solidFill>
-                        <a:srgbClr val="D5DDE8"/>
+                        <a:srgbClr val="D3E0F7"/>
                       </a:solidFill>
                       <a:prstDash val="solid"/>
                       <a:round/>
@@ -3143,7 +3547,7 @@
                       <a:tailEnd type="none" w="med" len="med"/>
                     </a:lnB>
                     <a:solidFill>
-                      <a:srgbClr val="F4F7FB"/>
+                      <a:srgbClr val="F3F7FE"/>
                     </a:solidFill>
                   </a:tcPr>
                 </a:tc>
@@ -3176,7 +3580,7 @@
                   <a:tcPr marL="109728" marR="109728" marT="109728" marB="109728" anchor="ctr">
                     <a:lnL w="9525" cap="flat" cmpd="sng" algn="ctr">
                       <a:solidFill>
-                        <a:srgbClr val="D5DDE8"/>
+                        <a:srgbClr val="D3E0F7"/>
                       </a:solidFill>
                       <a:prstDash val="solid"/>
                       <a:round/>
@@ -3185,7 +3589,7 @@
                     </a:lnL>
                     <a:lnR w="9525" cap="flat" cmpd="sng" algn="ctr">
                       <a:solidFill>
-                        <a:srgbClr val="D5DDE8"/>
+                        <a:srgbClr val="D3E0F7"/>
                       </a:solidFill>
                       <a:prstDash val="solid"/>
                       <a:round/>
@@ -3194,7 +3598,7 @@
                     </a:lnR>
                     <a:lnT w="9525" cap="flat" cmpd="sng" algn="ctr">
                       <a:solidFill>
-                        <a:srgbClr val="D5DDE8"/>
+                        <a:srgbClr val="D3E0F7"/>
                       </a:solidFill>
                       <a:prstDash val="solid"/>
                       <a:round/>
@@ -3203,7 +3607,7 @@
                     </a:lnT>
                     <a:lnB w="9525" cap="flat" cmpd="sng" algn="ctr">
                       <a:solidFill>
-                        <a:srgbClr val="D5DDE8"/>
+                        <a:srgbClr val="D3E0F7"/>
                       </a:solidFill>
                       <a:prstDash val="solid"/>
                       <a:round/>
@@ -3211,7 +3615,7 @@
                       <a:tailEnd type="none" w="med" len="med"/>
                     </a:lnB>
                     <a:solidFill>
-                      <a:srgbClr val="F4F7FB"/>
+                      <a:srgbClr val="F3F7FE"/>
                     </a:solidFill>
                   </a:tcPr>
                 </a:tc>
@@ -3228,7 +3632,7 @@
                       <a:r>
                         <a:rPr lang="en-US" sz="1500" b="1" dirty="0">
                           <a:solidFill>
-                            <a:srgbClr val="0F766E"/>
+                            <a:srgbClr val="1D4ED8"/>
                           </a:solidFill>
                           <a:latin typeface="Arial" pitchFamily="34" charset="0"/>
                           <a:ea typeface="Arial" pitchFamily="34" charset="-122"/>
@@ -3246,7 +3650,7 @@
                   <a:tcPr marL="109728" marR="109728" marT="109728" marB="109728" anchor="ctr">
                     <a:lnL w="9525" cap="flat" cmpd="sng" algn="ctr">
                       <a:solidFill>
-                        <a:srgbClr val="D5DDE8"/>
+                        <a:srgbClr val="D3E0F7"/>
                       </a:solidFill>
                       <a:prstDash val="solid"/>
                       <a:round/>
@@ -3255,7 +3659,7 @@
                     </a:lnL>
                     <a:lnR w="9525" cap="flat" cmpd="sng" algn="ctr">
                       <a:solidFill>
-                        <a:srgbClr val="D5DDE8"/>
+                        <a:srgbClr val="D3E0F7"/>
                       </a:solidFill>
                       <a:prstDash val="solid"/>
                       <a:round/>
@@ -3264,7 +3668,7 @@
                     </a:lnR>
                     <a:lnT w="9525" cap="flat" cmpd="sng" algn="ctr">
                       <a:solidFill>
-                        <a:srgbClr val="D5DDE8"/>
+                        <a:srgbClr val="D3E0F7"/>
                       </a:solidFill>
                       <a:prstDash val="solid"/>
                       <a:round/>
@@ -3273,7 +3677,7 @@
                     </a:lnT>
                     <a:lnB w="9525" cap="flat" cmpd="sng" algn="ctr">
                       <a:solidFill>
-                        <a:srgbClr val="D5DDE8"/>
+                        <a:srgbClr val="D3E0F7"/>
                       </a:solidFill>
                       <a:prstDash val="solid"/>
                       <a:round/>
@@ -3314,7 +3718,7 @@
                   <a:tcPr marL="109728" marR="109728" marT="109728" marB="109728" anchor="ctr">
                     <a:lnL w="9525" cap="flat" cmpd="sng" algn="ctr">
                       <a:solidFill>
-                        <a:srgbClr val="D5DDE8"/>
+                        <a:srgbClr val="D3E0F7"/>
                       </a:solidFill>
                       <a:prstDash val="solid"/>
                       <a:round/>
@@ -3323,7 +3727,7 @@
                     </a:lnL>
                     <a:lnR w="9525" cap="flat" cmpd="sng" algn="ctr">
                       <a:solidFill>
-                        <a:srgbClr val="D5DDE8"/>
+                        <a:srgbClr val="D3E0F7"/>
                       </a:solidFill>
                       <a:prstDash val="solid"/>
                       <a:round/>
@@ -3332,7 +3736,7 @@
                     </a:lnR>
                     <a:lnT w="9525" cap="flat" cmpd="sng" algn="ctr">
                       <a:solidFill>
-                        <a:srgbClr val="D5DDE8"/>
+                        <a:srgbClr val="D3E0F7"/>
                       </a:solidFill>
                       <a:prstDash val="solid"/>
                       <a:round/>
@@ -3341,7 +3745,7 @@
                     </a:lnT>
                     <a:lnB w="9525" cap="flat" cmpd="sng" algn="ctr">
                       <a:solidFill>
-                        <a:srgbClr val="D5DDE8"/>
+                        <a:srgbClr val="D3E0F7"/>
                       </a:solidFill>
                       <a:prstDash val="solid"/>
                       <a:round/>
@@ -3382,7 +3786,7 @@
                   <a:tcPr marL="109728" marR="109728" marT="109728" marB="109728" anchor="ctr">
                     <a:lnL w="9525" cap="flat" cmpd="sng" algn="ctr">
                       <a:solidFill>
-                        <a:srgbClr val="D5DDE8"/>
+                        <a:srgbClr val="D3E0F7"/>
                       </a:solidFill>
                       <a:prstDash val="solid"/>
                       <a:round/>
@@ -3391,7 +3795,7 @@
                     </a:lnL>
                     <a:lnR w="9525" cap="flat" cmpd="sng" algn="ctr">
                       <a:solidFill>
-                        <a:srgbClr val="D5DDE8"/>
+                        <a:srgbClr val="D3E0F7"/>
                       </a:solidFill>
                       <a:prstDash val="solid"/>
                       <a:round/>
@@ -3400,7 +3804,7 @@
                     </a:lnR>
                     <a:lnT w="9525" cap="flat" cmpd="sng" algn="ctr">
                       <a:solidFill>
-                        <a:srgbClr val="D5DDE8"/>
+                        <a:srgbClr val="D3E0F7"/>
                       </a:solidFill>
                       <a:prstDash val="solid"/>
                       <a:round/>
@@ -3409,7 +3813,7 @@
                     </a:lnT>
                     <a:lnB w="9525" cap="flat" cmpd="sng" algn="ctr">
                       <a:solidFill>
-                        <a:srgbClr val="D5DDE8"/>
+                        <a:srgbClr val="D3E0F7"/>
                       </a:solidFill>
                       <a:prstDash val="solid"/>
                       <a:round/>
@@ -3434,7 +3838,7 @@
                       <a:r>
                         <a:rPr lang="en-US" sz="1500" b="1" dirty="0">
                           <a:solidFill>
-                            <a:srgbClr val="0F766E"/>
+                            <a:srgbClr val="1D4ED8"/>
                           </a:solidFill>
                           <a:latin typeface="Arial" pitchFamily="34" charset="0"/>
                           <a:ea typeface="Arial" pitchFamily="34" charset="-122"/>
@@ -3452,7 +3856,7 @@
                   <a:tcPr marL="109728" marR="109728" marT="109728" marB="109728" anchor="ctr">
                     <a:lnL w="9525" cap="flat" cmpd="sng" algn="ctr">
                       <a:solidFill>
-                        <a:srgbClr val="D5DDE8"/>
+                        <a:srgbClr val="D3E0F7"/>
                       </a:solidFill>
                       <a:prstDash val="solid"/>
                       <a:round/>
@@ -3461,7 +3865,7 @@
                     </a:lnL>
                     <a:lnR w="9525" cap="flat" cmpd="sng" algn="ctr">
                       <a:solidFill>
-                        <a:srgbClr val="D5DDE8"/>
+                        <a:srgbClr val="D3E0F7"/>
                       </a:solidFill>
                       <a:prstDash val="solid"/>
                       <a:round/>
@@ -3470,7 +3874,7 @@
                     </a:lnR>
                     <a:lnT w="9525" cap="flat" cmpd="sng" algn="ctr">
                       <a:solidFill>
-                        <a:srgbClr val="D5DDE8"/>
+                        <a:srgbClr val="D3E0F7"/>
                       </a:solidFill>
                       <a:prstDash val="solid"/>
                       <a:round/>
@@ -3479,7 +3883,7 @@
                     </a:lnT>
                     <a:lnB w="9525" cap="flat" cmpd="sng" algn="ctr">
                       <a:solidFill>
-                        <a:srgbClr val="D5DDE8"/>
+                        <a:srgbClr val="D3E0F7"/>
                       </a:solidFill>
                       <a:prstDash val="solid"/>
                       <a:round/>
@@ -3487,7 +3891,7 @@
                       <a:tailEnd type="none" w="med" len="med"/>
                     </a:lnB>
                     <a:solidFill>
-                      <a:srgbClr val="F4F7FB"/>
+                      <a:srgbClr val="F3F7FE"/>
                     </a:solidFill>
                   </a:tcPr>
                 </a:tc>
@@ -3520,7 +3924,7 @@
                   <a:tcPr marL="109728" marR="109728" marT="109728" marB="109728" anchor="ctr">
                     <a:lnL w="9525" cap="flat" cmpd="sng" algn="ctr">
                       <a:solidFill>
-                        <a:srgbClr val="D5DDE8"/>
+                        <a:srgbClr val="D3E0F7"/>
                       </a:solidFill>
                       <a:prstDash val="solid"/>
                       <a:round/>
@@ -3529,7 +3933,7 @@
                     </a:lnL>
                     <a:lnR w="9525" cap="flat" cmpd="sng" algn="ctr">
                       <a:solidFill>
-                        <a:srgbClr val="D5DDE8"/>
+                        <a:srgbClr val="D3E0F7"/>
                       </a:solidFill>
                       <a:prstDash val="solid"/>
                       <a:round/>
@@ -3538,7 +3942,7 @@
                     </a:lnR>
                     <a:lnT w="9525" cap="flat" cmpd="sng" algn="ctr">
                       <a:solidFill>
-                        <a:srgbClr val="D5DDE8"/>
+                        <a:srgbClr val="D3E0F7"/>
                       </a:solidFill>
                       <a:prstDash val="solid"/>
                       <a:round/>
@@ -3547,7 +3951,7 @@
                     </a:lnT>
                     <a:lnB w="9525" cap="flat" cmpd="sng" algn="ctr">
                       <a:solidFill>
-                        <a:srgbClr val="D5DDE8"/>
+                        <a:srgbClr val="D3E0F7"/>
                       </a:solidFill>
                       <a:prstDash val="solid"/>
                       <a:round/>
@@ -3555,7 +3959,7 @@
                       <a:tailEnd type="none" w="med" len="med"/>
                     </a:lnB>
                     <a:solidFill>
-                      <a:srgbClr val="F4F7FB"/>
+                      <a:srgbClr val="F3F7FE"/>
                     </a:solidFill>
                   </a:tcPr>
                 </a:tc>
@@ -3588,7 +3992,7 @@
                   <a:tcPr marL="109728" marR="109728" marT="109728" marB="109728" anchor="ctr">
                     <a:lnL w="9525" cap="flat" cmpd="sng" algn="ctr">
                       <a:solidFill>
-                        <a:srgbClr val="D5DDE8"/>
+                        <a:srgbClr val="D3E0F7"/>
                       </a:solidFill>
                       <a:prstDash val="solid"/>
                       <a:round/>
@@ -3597,7 +4001,7 @@
                     </a:lnL>
                     <a:lnR w="9525" cap="flat" cmpd="sng" algn="ctr">
                       <a:solidFill>
-                        <a:srgbClr val="D5DDE8"/>
+                        <a:srgbClr val="D3E0F7"/>
                       </a:solidFill>
                       <a:prstDash val="solid"/>
                       <a:round/>
@@ -3606,7 +4010,7 @@
                     </a:lnR>
                     <a:lnT w="9525" cap="flat" cmpd="sng" algn="ctr">
                       <a:solidFill>
-                        <a:srgbClr val="D5DDE8"/>
+                        <a:srgbClr val="D3E0F7"/>
                       </a:solidFill>
                       <a:prstDash val="solid"/>
                       <a:round/>
@@ -3615,7 +4019,7 @@
                     </a:lnT>
                     <a:lnB w="9525" cap="flat" cmpd="sng" algn="ctr">
                       <a:solidFill>
-                        <a:srgbClr val="D5DDE8"/>
+                        <a:srgbClr val="D3E0F7"/>
                       </a:solidFill>
                       <a:prstDash val="solid"/>
                       <a:round/>
@@ -3623,7 +4027,7 @@
                       <a:tailEnd type="none" w="med" len="med"/>
                     </a:lnB>
                     <a:solidFill>
-                      <a:srgbClr val="F4F7FB"/>
+                      <a:srgbClr val="F3F7FE"/>
                     </a:solidFill>
                   </a:tcPr>
                 </a:tc>
@@ -3640,7 +4044,7 @@
                       <a:r>
                         <a:rPr lang="en-US" sz="1500" b="1" dirty="0">
                           <a:solidFill>
-                            <a:srgbClr val="0F766E"/>
+                            <a:srgbClr val="1D4ED8"/>
                           </a:solidFill>
                           <a:latin typeface="Arial" pitchFamily="34" charset="0"/>
                           <a:ea typeface="Arial" pitchFamily="34" charset="-122"/>
@@ -3658,7 +4062,7 @@
                   <a:tcPr marL="109728" marR="109728" marT="109728" marB="109728" anchor="ctr">
                     <a:lnL w="9525" cap="flat" cmpd="sng" algn="ctr">
                       <a:solidFill>
-                        <a:srgbClr val="D5DDE8"/>
+                        <a:srgbClr val="D3E0F7"/>
                       </a:solidFill>
                       <a:prstDash val="solid"/>
                       <a:round/>
@@ -3667,7 +4071,7 @@
                     </a:lnL>
                     <a:lnR w="9525" cap="flat" cmpd="sng" algn="ctr">
                       <a:solidFill>
-                        <a:srgbClr val="D5DDE8"/>
+                        <a:srgbClr val="D3E0F7"/>
                       </a:solidFill>
                       <a:prstDash val="solid"/>
                       <a:round/>
@@ -3676,7 +4080,7 @@
                     </a:lnR>
                     <a:lnT w="9525" cap="flat" cmpd="sng" algn="ctr">
                       <a:solidFill>
-                        <a:srgbClr val="D5DDE8"/>
+                        <a:srgbClr val="D3E0F7"/>
                       </a:solidFill>
                       <a:prstDash val="solid"/>
                       <a:round/>
@@ -3685,7 +4089,7 @@
                     </a:lnT>
                     <a:lnB w="9525" cap="flat" cmpd="sng" algn="ctr">
                       <a:solidFill>
-                        <a:srgbClr val="D5DDE8"/>
+                        <a:srgbClr val="D3E0F7"/>
                       </a:solidFill>
                       <a:prstDash val="solid"/>
                       <a:round/>
@@ -3726,7 +4130,7 @@
                   <a:tcPr marL="109728" marR="109728" marT="109728" marB="109728" anchor="ctr">
                     <a:lnL w="9525" cap="flat" cmpd="sng" algn="ctr">
                       <a:solidFill>
-                        <a:srgbClr val="D5DDE8"/>
+                        <a:srgbClr val="D3E0F7"/>
                       </a:solidFill>
                       <a:prstDash val="solid"/>
                       <a:round/>
@@ -3735,7 +4139,7 @@
                     </a:lnL>
                     <a:lnR w="9525" cap="flat" cmpd="sng" algn="ctr">
                       <a:solidFill>
-                        <a:srgbClr val="D5DDE8"/>
+                        <a:srgbClr val="D3E0F7"/>
                       </a:solidFill>
                       <a:prstDash val="solid"/>
                       <a:round/>
@@ -3744,7 +4148,7 @@
                     </a:lnR>
                     <a:lnT w="9525" cap="flat" cmpd="sng" algn="ctr">
                       <a:solidFill>
-                        <a:srgbClr val="D5DDE8"/>
+                        <a:srgbClr val="D3E0F7"/>
                       </a:solidFill>
                       <a:prstDash val="solid"/>
                       <a:round/>
@@ -3753,7 +4157,7 @@
                     </a:lnT>
                     <a:lnB w="9525" cap="flat" cmpd="sng" algn="ctr">
                       <a:solidFill>
-                        <a:srgbClr val="D5DDE8"/>
+                        <a:srgbClr val="D3E0F7"/>
                       </a:solidFill>
                       <a:prstDash val="solid"/>
                       <a:round/>
@@ -3794,7 +4198,7 @@
                   <a:tcPr marL="109728" marR="109728" marT="109728" marB="109728" anchor="ctr">
                     <a:lnL w="9525" cap="flat" cmpd="sng" algn="ctr">
                       <a:solidFill>
-                        <a:srgbClr val="D5DDE8"/>
+                        <a:srgbClr val="D3E0F7"/>
                       </a:solidFill>
                       <a:prstDash val="solid"/>
                       <a:round/>
@@ -3803,7 +4207,7 @@
                     </a:lnL>
                     <a:lnR w="9525" cap="flat" cmpd="sng" algn="ctr">
                       <a:solidFill>
-                        <a:srgbClr val="D5DDE8"/>
+                        <a:srgbClr val="D3E0F7"/>
                       </a:solidFill>
                       <a:prstDash val="solid"/>
                       <a:round/>
@@ -3812,7 +4216,7 @@
                     </a:lnR>
                     <a:lnT w="9525" cap="flat" cmpd="sng" algn="ctr">
                       <a:solidFill>
-                        <a:srgbClr val="D5DDE8"/>
+                        <a:srgbClr val="D3E0F7"/>
                       </a:solidFill>
                       <a:prstDash val="solid"/>
                       <a:round/>
@@ -3821,7 +4225,7 @@
                     </a:lnT>
                     <a:lnB w="9525" cap="flat" cmpd="sng" algn="ctr">
                       <a:solidFill>
-                        <a:srgbClr val="D5DDE8"/>
+                        <a:srgbClr val="D3E0F7"/>
                       </a:solidFill>
                       <a:prstDash val="solid"/>
                       <a:round/>
@@ -3916,6 +4320,118 @@
           </a:p>
         </p:txBody>
       </p:sp>
+      <p:sp>
+        <p:nvSpPr>
+          <p:cNvPr id="7" name="Rectangle 6"/>
+          <p:cNvSpPr/>
+          <p:nvPr/>
+        </p:nvSpPr>
+        <p:spPr>
+          <a:xfrm>
+            <a:off x="0" y="0"/>
+            <a:ext cx="12192000" cy="82296"/>
+          </a:xfrm>
+          <a:prstGeom prst="rect">
+            <a:avLst/>
+          </a:prstGeom>
+          <a:solidFill>
+            <a:srgbClr val="0B132B"/>
+          </a:solidFill>
+          <a:ln>
+            <a:noFill/>
+          </a:ln>
+          <a:effectLst/>
+        </p:spPr>
+        <p:style>
+          <a:lnRef idx="1">
+            <a:schemeClr val="accent1"/>
+          </a:lnRef>
+          <a:fillRef idx="3">
+            <a:schemeClr val="accent1"/>
+          </a:fillRef>
+          <a:effectRef idx="2">
+            <a:schemeClr val="accent1"/>
+          </a:effectRef>
+          <a:fontRef idx="minor">
+            <a:schemeClr val="lt1"/>
+          </a:fontRef>
+        </p:style>
+        <p:txBody>
+          <a:bodyPr rtlCol="0" anchor="ctr"/>
+          <a:lstStyle/>
+          <a:p>
+            <a:pPr algn="ctr"/>
+          </a:p>
+        </p:txBody>
+      </p:sp>
+      <p:sp>
+        <p:nvSpPr>
+          <p:cNvPr id="8" name="Rectangle 7"/>
+          <p:cNvSpPr/>
+          <p:nvPr/>
+        </p:nvSpPr>
+        <p:spPr>
+          <a:xfrm>
+            <a:off x="0" y="82296"/>
+            <a:ext cx="1463040" cy="45720"/>
+          </a:xfrm>
+          <a:prstGeom prst="rect">
+            <a:avLst/>
+          </a:prstGeom>
+          <a:solidFill>
+            <a:srgbClr val="2563EB"/>
+          </a:solidFill>
+          <a:ln>
+            <a:noFill/>
+          </a:ln>
+          <a:effectLst/>
+        </p:spPr>
+        <p:style>
+          <a:lnRef idx="1">
+            <a:schemeClr val="accent1"/>
+          </a:lnRef>
+          <a:fillRef idx="3">
+            <a:schemeClr val="accent1"/>
+          </a:fillRef>
+          <a:effectRef idx="2">
+            <a:schemeClr val="accent1"/>
+          </a:effectRef>
+          <a:fontRef idx="minor">
+            <a:schemeClr val="lt1"/>
+          </a:fontRef>
+        </p:style>
+        <p:txBody>
+          <a:bodyPr rtlCol="0" anchor="ctr"/>
+          <a:lstStyle/>
+          <a:p>
+            <a:pPr algn="ctr"/>
+          </a:p>
+        </p:txBody>
+      </p:sp>
+      <p:pic>
+        <p:nvPicPr>
+          <p:cNvPr id="9" name="Picture 8" descr="convva-primary.png"/>
+          <p:cNvPicPr>
+            <a:picLocks noChangeAspect="1"/>
+          </p:cNvPicPr>
+          <p:nvPr/>
+        </p:nvPicPr>
+        <p:blipFill>
+          <a:blip r:embed="rId3"/>
+          <a:stretch>
+            <a:fillRect/>
+          </a:stretch>
+        </p:blipFill>
+        <p:spPr>
+          <a:xfrm>
+            <a:off x="10363200" y="6383528"/>
+            <a:ext cx="1005839" cy="290576"/>
+          </a:xfrm>
+          <a:prstGeom prst="rect">
+            <a:avLst/>
+          </a:prstGeom>
+        </p:spPr>
+      </p:pic>
     </p:spTree>
   </p:cSld>
   <p:clrMapOvr>
@@ -3975,7 +4491,7 @@
             <a:r>
               <a:rPr lang="en-US" sz="2600" b="1" dirty="0">
                 <a:solidFill>
-                  <a:srgbClr val="15253D"/>
+                  <a:srgbClr val="0B132B"/>
                 </a:solidFill>
                 <a:latin typeface="Arial" pitchFamily="34" charset="0"/>
                 <a:ea typeface="Arial" pitchFamily="34" charset="-122"/>
@@ -4083,7 +4599,7 @@
                   <a:tcPr marL="109728" marR="109728" marT="109728" marB="109728" anchor="ctr">
                     <a:lnL w="9525" cap="flat" cmpd="sng" algn="ctr">
                       <a:solidFill>
-                        <a:srgbClr val="D5DDE8"/>
+                        <a:srgbClr val="D3E0F7"/>
                       </a:solidFill>
                       <a:prstDash val="solid"/>
                       <a:round/>
@@ -4092,7 +4608,7 @@
                     </a:lnL>
                     <a:lnR w="9525" cap="flat" cmpd="sng" algn="ctr">
                       <a:solidFill>
-                        <a:srgbClr val="D5DDE8"/>
+                        <a:srgbClr val="D3E0F7"/>
                       </a:solidFill>
                       <a:prstDash val="solid"/>
                       <a:round/>
@@ -4101,7 +4617,7 @@
                     </a:lnR>
                     <a:lnT w="9525" cap="flat" cmpd="sng" algn="ctr">
                       <a:solidFill>
-                        <a:srgbClr val="D5DDE8"/>
+                        <a:srgbClr val="D3E0F7"/>
                       </a:solidFill>
                       <a:prstDash val="solid"/>
                       <a:round/>
@@ -4110,7 +4626,7 @@
                     </a:lnT>
                     <a:lnB w="9525" cap="flat" cmpd="sng" algn="ctr">
                       <a:solidFill>
-                        <a:srgbClr val="D5DDE8"/>
+                        <a:srgbClr val="D3E0F7"/>
                       </a:solidFill>
                       <a:prstDash val="solid"/>
                       <a:round/>
@@ -4118,7 +4634,7 @@
                       <a:tailEnd type="none" w="med" len="med"/>
                     </a:lnB>
                     <a:solidFill>
-                      <a:srgbClr val="15253D"/>
+                      <a:srgbClr val="0B132B"/>
                     </a:solidFill>
                   </a:tcPr>
                 </a:tc>
@@ -4151,7 +4667,7 @@
                   <a:tcPr marL="109728" marR="109728" marT="109728" marB="109728" anchor="ctr">
                     <a:lnL w="9525" cap="flat" cmpd="sng" algn="ctr">
                       <a:solidFill>
-                        <a:srgbClr val="D5DDE8"/>
+                        <a:srgbClr val="D3E0F7"/>
                       </a:solidFill>
                       <a:prstDash val="solid"/>
                       <a:round/>
@@ -4160,7 +4676,7 @@
                     </a:lnL>
                     <a:lnR w="9525" cap="flat" cmpd="sng" algn="ctr">
                       <a:solidFill>
-                        <a:srgbClr val="D5DDE8"/>
+                        <a:srgbClr val="D3E0F7"/>
                       </a:solidFill>
                       <a:prstDash val="solid"/>
                       <a:round/>
@@ -4169,7 +4685,7 @@
                     </a:lnR>
                     <a:lnT w="9525" cap="flat" cmpd="sng" algn="ctr">
                       <a:solidFill>
-                        <a:srgbClr val="D5DDE8"/>
+                        <a:srgbClr val="D3E0F7"/>
                       </a:solidFill>
                       <a:prstDash val="solid"/>
                       <a:round/>
@@ -4178,7 +4694,7 @@
                     </a:lnT>
                     <a:lnB w="9525" cap="flat" cmpd="sng" algn="ctr">
                       <a:solidFill>
-                        <a:srgbClr val="D5DDE8"/>
+                        <a:srgbClr val="D3E0F7"/>
                       </a:solidFill>
                       <a:prstDash val="solid"/>
                       <a:round/>
@@ -4186,7 +4702,7 @@
                       <a:tailEnd type="none" w="med" len="med"/>
                     </a:lnB>
                     <a:solidFill>
-                      <a:srgbClr val="15253D"/>
+                      <a:srgbClr val="0B132B"/>
                     </a:solidFill>
                   </a:tcPr>
                 </a:tc>
@@ -4219,7 +4735,7 @@
                   <a:tcPr marL="109728" marR="109728" marT="109728" marB="109728" anchor="ctr">
                     <a:lnL w="9525" cap="flat" cmpd="sng" algn="ctr">
                       <a:solidFill>
-                        <a:srgbClr val="D5DDE8"/>
+                        <a:srgbClr val="D3E0F7"/>
                       </a:solidFill>
                       <a:prstDash val="solid"/>
                       <a:round/>
@@ -4228,7 +4744,7 @@
                     </a:lnL>
                     <a:lnR w="9525" cap="flat" cmpd="sng" algn="ctr">
                       <a:solidFill>
-                        <a:srgbClr val="D5DDE8"/>
+                        <a:srgbClr val="D3E0F7"/>
                       </a:solidFill>
                       <a:prstDash val="solid"/>
                       <a:round/>
@@ -4237,7 +4753,7 @@
                     </a:lnR>
                     <a:lnT w="9525" cap="flat" cmpd="sng" algn="ctr">
                       <a:solidFill>
-                        <a:srgbClr val="D5DDE8"/>
+                        <a:srgbClr val="D3E0F7"/>
                       </a:solidFill>
                       <a:prstDash val="solid"/>
                       <a:round/>
@@ -4246,7 +4762,7 @@
                     </a:lnT>
                     <a:lnB w="9525" cap="flat" cmpd="sng" algn="ctr">
                       <a:solidFill>
-                        <a:srgbClr val="D5DDE8"/>
+                        <a:srgbClr val="D3E0F7"/>
                       </a:solidFill>
                       <a:prstDash val="solid"/>
                       <a:round/>
@@ -4254,7 +4770,7 @@
                       <a:tailEnd type="none" w="med" len="med"/>
                     </a:lnB>
                     <a:solidFill>
-                      <a:srgbClr val="15253D"/>
+                      <a:srgbClr val="0B132B"/>
                     </a:solidFill>
                   </a:tcPr>
                 </a:tc>
@@ -4271,7 +4787,7 @@
                       <a:r>
                         <a:rPr lang="en-US" sz="1500" b="1" dirty="0">
                           <a:solidFill>
-                            <a:srgbClr val="0F766E"/>
+                            <a:srgbClr val="1D4ED8"/>
                           </a:solidFill>
                           <a:latin typeface="Arial" pitchFamily="34" charset="0"/>
                           <a:ea typeface="Arial" pitchFamily="34" charset="-122"/>
@@ -4289,7 +4805,7 @@
                   <a:tcPr marL="109728" marR="109728" marT="109728" marB="109728" anchor="ctr">
                     <a:lnL w="9525" cap="flat" cmpd="sng" algn="ctr">
                       <a:solidFill>
-                        <a:srgbClr val="D5DDE8"/>
+                        <a:srgbClr val="D3E0F7"/>
                       </a:solidFill>
                       <a:prstDash val="solid"/>
                       <a:round/>
@@ -4298,7 +4814,7 @@
                     </a:lnL>
                     <a:lnR w="9525" cap="flat" cmpd="sng" algn="ctr">
                       <a:solidFill>
-                        <a:srgbClr val="D5DDE8"/>
+                        <a:srgbClr val="D3E0F7"/>
                       </a:solidFill>
                       <a:prstDash val="solid"/>
                       <a:round/>
@@ -4307,7 +4823,7 @@
                     </a:lnR>
                     <a:lnT w="9525" cap="flat" cmpd="sng" algn="ctr">
                       <a:solidFill>
-                        <a:srgbClr val="D5DDE8"/>
+                        <a:srgbClr val="D3E0F7"/>
                       </a:solidFill>
                       <a:prstDash val="solid"/>
                       <a:round/>
@@ -4316,7 +4832,7 @@
                     </a:lnT>
                     <a:lnB w="9525" cap="flat" cmpd="sng" algn="ctr">
                       <a:solidFill>
-                        <a:srgbClr val="D5DDE8"/>
+                        <a:srgbClr val="D3E0F7"/>
                       </a:solidFill>
                       <a:prstDash val="solid"/>
                       <a:round/>
@@ -4324,7 +4840,7 @@
                       <a:tailEnd type="none" w="med" len="med"/>
                     </a:lnB>
                     <a:solidFill>
-                      <a:srgbClr val="F4F7FB"/>
+                      <a:srgbClr val="F3F7FE"/>
                     </a:solidFill>
                   </a:tcPr>
                 </a:tc>
@@ -4357,7 +4873,7 @@
                   <a:tcPr marL="109728" marR="109728" marT="109728" marB="109728" anchor="ctr">
                     <a:lnL w="9525" cap="flat" cmpd="sng" algn="ctr">
                       <a:solidFill>
-                        <a:srgbClr val="D5DDE8"/>
+                        <a:srgbClr val="D3E0F7"/>
                       </a:solidFill>
                       <a:prstDash val="solid"/>
                       <a:round/>
@@ -4366,7 +4882,7 @@
                     </a:lnL>
                     <a:lnR w="9525" cap="flat" cmpd="sng" algn="ctr">
                       <a:solidFill>
-                        <a:srgbClr val="D5DDE8"/>
+                        <a:srgbClr val="D3E0F7"/>
                       </a:solidFill>
                       <a:prstDash val="solid"/>
                       <a:round/>
@@ -4375,7 +4891,7 @@
                     </a:lnR>
                     <a:lnT w="9525" cap="flat" cmpd="sng" algn="ctr">
                       <a:solidFill>
-                        <a:srgbClr val="D5DDE8"/>
+                        <a:srgbClr val="D3E0F7"/>
                       </a:solidFill>
                       <a:prstDash val="solid"/>
                       <a:round/>
@@ -4384,7 +4900,7 @@
                     </a:lnT>
                     <a:lnB w="9525" cap="flat" cmpd="sng" algn="ctr">
                       <a:solidFill>
-                        <a:srgbClr val="D5DDE8"/>
+                        <a:srgbClr val="D3E0F7"/>
                       </a:solidFill>
                       <a:prstDash val="solid"/>
                       <a:round/>
@@ -4392,7 +4908,7 @@
                       <a:tailEnd type="none" w="med" len="med"/>
                     </a:lnB>
                     <a:solidFill>
-                      <a:srgbClr val="F4F7FB"/>
+                      <a:srgbClr val="F3F7FE"/>
                     </a:solidFill>
                   </a:tcPr>
                 </a:tc>
@@ -4425,7 +4941,7 @@
                   <a:tcPr marL="109728" marR="109728" marT="109728" marB="109728" anchor="ctr">
                     <a:lnL w="9525" cap="flat" cmpd="sng" algn="ctr">
                       <a:solidFill>
-                        <a:srgbClr val="D5DDE8"/>
+                        <a:srgbClr val="D3E0F7"/>
                       </a:solidFill>
                       <a:prstDash val="solid"/>
                       <a:round/>
@@ -4434,7 +4950,7 @@
                     </a:lnL>
                     <a:lnR w="9525" cap="flat" cmpd="sng" algn="ctr">
                       <a:solidFill>
-                        <a:srgbClr val="D5DDE8"/>
+                        <a:srgbClr val="D3E0F7"/>
                       </a:solidFill>
                       <a:prstDash val="solid"/>
                       <a:round/>
@@ -4443,7 +4959,7 @@
                     </a:lnR>
                     <a:lnT w="9525" cap="flat" cmpd="sng" algn="ctr">
                       <a:solidFill>
-                        <a:srgbClr val="D5DDE8"/>
+                        <a:srgbClr val="D3E0F7"/>
                       </a:solidFill>
                       <a:prstDash val="solid"/>
                       <a:round/>
@@ -4452,7 +4968,7 @@
                     </a:lnT>
                     <a:lnB w="9525" cap="flat" cmpd="sng" algn="ctr">
                       <a:solidFill>
-                        <a:srgbClr val="D5DDE8"/>
+                        <a:srgbClr val="D3E0F7"/>
                       </a:solidFill>
                       <a:prstDash val="solid"/>
                       <a:round/>
@@ -4460,7 +4976,7 @@
                       <a:tailEnd type="none" w="med" len="med"/>
                     </a:lnB>
                     <a:solidFill>
-                      <a:srgbClr val="F4F7FB"/>
+                      <a:srgbClr val="F3F7FE"/>
                     </a:solidFill>
                   </a:tcPr>
                 </a:tc>
@@ -4477,7 +4993,7 @@
                       <a:r>
                         <a:rPr lang="en-US" sz="1500" b="1" dirty="0">
                           <a:solidFill>
-                            <a:srgbClr val="0F766E"/>
+                            <a:srgbClr val="1D4ED8"/>
                           </a:solidFill>
                           <a:latin typeface="Arial" pitchFamily="34" charset="0"/>
                           <a:ea typeface="Arial" pitchFamily="34" charset="-122"/>
@@ -4495,7 +5011,7 @@
                   <a:tcPr marL="109728" marR="109728" marT="109728" marB="109728" anchor="ctr">
                     <a:lnL w="9525" cap="flat" cmpd="sng" algn="ctr">
                       <a:solidFill>
-                        <a:srgbClr val="D5DDE8"/>
+                        <a:srgbClr val="D3E0F7"/>
                       </a:solidFill>
                       <a:prstDash val="solid"/>
                       <a:round/>
@@ -4504,7 +5020,7 @@
                     </a:lnL>
                     <a:lnR w="9525" cap="flat" cmpd="sng" algn="ctr">
                       <a:solidFill>
-                        <a:srgbClr val="D5DDE8"/>
+                        <a:srgbClr val="D3E0F7"/>
                       </a:solidFill>
                       <a:prstDash val="solid"/>
                       <a:round/>
@@ -4513,7 +5029,7 @@
                     </a:lnR>
                     <a:lnT w="9525" cap="flat" cmpd="sng" algn="ctr">
                       <a:solidFill>
-                        <a:srgbClr val="D5DDE8"/>
+                        <a:srgbClr val="D3E0F7"/>
                       </a:solidFill>
                       <a:prstDash val="solid"/>
                       <a:round/>
@@ -4522,7 +5038,7 @@
                     </a:lnT>
                     <a:lnB w="9525" cap="flat" cmpd="sng" algn="ctr">
                       <a:solidFill>
-                        <a:srgbClr val="D5DDE8"/>
+                        <a:srgbClr val="D3E0F7"/>
                       </a:solidFill>
                       <a:prstDash val="solid"/>
                       <a:round/>
@@ -4563,7 +5079,7 @@
                   <a:tcPr marL="109728" marR="109728" marT="109728" marB="109728" anchor="ctr">
                     <a:lnL w="9525" cap="flat" cmpd="sng" algn="ctr">
                       <a:solidFill>
-                        <a:srgbClr val="D5DDE8"/>
+                        <a:srgbClr val="D3E0F7"/>
                       </a:solidFill>
                       <a:prstDash val="solid"/>
                       <a:round/>
@@ -4572,7 +5088,7 @@
                     </a:lnL>
                     <a:lnR w="9525" cap="flat" cmpd="sng" algn="ctr">
                       <a:solidFill>
-                        <a:srgbClr val="D5DDE8"/>
+                        <a:srgbClr val="D3E0F7"/>
                       </a:solidFill>
                       <a:prstDash val="solid"/>
                       <a:round/>
@@ -4581,7 +5097,7 @@
                     </a:lnR>
                     <a:lnT w="9525" cap="flat" cmpd="sng" algn="ctr">
                       <a:solidFill>
-                        <a:srgbClr val="D5DDE8"/>
+                        <a:srgbClr val="D3E0F7"/>
                       </a:solidFill>
                       <a:prstDash val="solid"/>
                       <a:round/>
@@ -4590,7 +5106,7 @@
                     </a:lnT>
                     <a:lnB w="9525" cap="flat" cmpd="sng" algn="ctr">
                       <a:solidFill>
-                        <a:srgbClr val="D5DDE8"/>
+                        <a:srgbClr val="D3E0F7"/>
                       </a:solidFill>
                       <a:prstDash val="solid"/>
                       <a:round/>
@@ -4631,7 +5147,7 @@
                   <a:tcPr marL="109728" marR="109728" marT="109728" marB="109728" anchor="ctr">
                     <a:lnL w="9525" cap="flat" cmpd="sng" algn="ctr">
                       <a:solidFill>
-                        <a:srgbClr val="D5DDE8"/>
+                        <a:srgbClr val="D3E0F7"/>
                       </a:solidFill>
                       <a:prstDash val="solid"/>
                       <a:round/>
@@ -4640,7 +5156,7 @@
                     </a:lnL>
                     <a:lnR w="9525" cap="flat" cmpd="sng" algn="ctr">
                       <a:solidFill>
-                        <a:srgbClr val="D5DDE8"/>
+                        <a:srgbClr val="D3E0F7"/>
                       </a:solidFill>
                       <a:prstDash val="solid"/>
                       <a:round/>
@@ -4649,7 +5165,7 @@
                     </a:lnR>
                     <a:lnT w="9525" cap="flat" cmpd="sng" algn="ctr">
                       <a:solidFill>
-                        <a:srgbClr val="D5DDE8"/>
+                        <a:srgbClr val="D3E0F7"/>
                       </a:solidFill>
                       <a:prstDash val="solid"/>
                       <a:round/>
@@ -4658,7 +5174,7 @@
                     </a:lnT>
                     <a:lnB w="9525" cap="flat" cmpd="sng" algn="ctr">
                       <a:solidFill>
-                        <a:srgbClr val="D5DDE8"/>
+                        <a:srgbClr val="D3E0F7"/>
                       </a:solidFill>
                       <a:prstDash val="solid"/>
                       <a:round/>
@@ -4683,7 +5199,7 @@
                       <a:r>
                         <a:rPr lang="en-US" sz="1500" b="1" dirty="0">
                           <a:solidFill>
-                            <a:srgbClr val="0F766E"/>
+                            <a:srgbClr val="1D4ED8"/>
                           </a:solidFill>
                           <a:latin typeface="Arial" pitchFamily="34" charset="0"/>
                           <a:ea typeface="Arial" pitchFamily="34" charset="-122"/>
@@ -4701,7 +5217,7 @@
                   <a:tcPr marL="109728" marR="109728" marT="109728" marB="109728" anchor="ctr">
                     <a:lnL w="9525" cap="flat" cmpd="sng" algn="ctr">
                       <a:solidFill>
-                        <a:srgbClr val="D5DDE8"/>
+                        <a:srgbClr val="D3E0F7"/>
                       </a:solidFill>
                       <a:prstDash val="solid"/>
                       <a:round/>
@@ -4710,7 +5226,7 @@
                     </a:lnL>
                     <a:lnR w="9525" cap="flat" cmpd="sng" algn="ctr">
                       <a:solidFill>
-                        <a:srgbClr val="D5DDE8"/>
+                        <a:srgbClr val="D3E0F7"/>
                       </a:solidFill>
                       <a:prstDash val="solid"/>
                       <a:round/>
@@ -4719,7 +5235,7 @@
                     </a:lnR>
                     <a:lnT w="9525" cap="flat" cmpd="sng" algn="ctr">
                       <a:solidFill>
-                        <a:srgbClr val="D5DDE8"/>
+                        <a:srgbClr val="D3E0F7"/>
                       </a:solidFill>
                       <a:prstDash val="solid"/>
                       <a:round/>
@@ -4728,7 +5244,7 @@
                     </a:lnT>
                     <a:lnB w="9525" cap="flat" cmpd="sng" algn="ctr">
                       <a:solidFill>
-                        <a:srgbClr val="D5DDE8"/>
+                        <a:srgbClr val="D3E0F7"/>
                       </a:solidFill>
                       <a:prstDash val="solid"/>
                       <a:round/>
@@ -4736,7 +5252,7 @@
                       <a:tailEnd type="none" w="med" len="med"/>
                     </a:lnB>
                     <a:solidFill>
-                      <a:srgbClr val="F4F7FB"/>
+                      <a:srgbClr val="F3F7FE"/>
                     </a:solidFill>
                   </a:tcPr>
                 </a:tc>
@@ -4769,7 +5285,7 @@
                   <a:tcPr marL="109728" marR="109728" marT="109728" marB="109728" anchor="ctr">
                     <a:lnL w="9525" cap="flat" cmpd="sng" algn="ctr">
                       <a:solidFill>
-                        <a:srgbClr val="D5DDE8"/>
+                        <a:srgbClr val="D3E0F7"/>
                       </a:solidFill>
                       <a:prstDash val="solid"/>
                       <a:round/>
@@ -4778,7 +5294,7 @@
                     </a:lnL>
                     <a:lnR w="9525" cap="flat" cmpd="sng" algn="ctr">
                       <a:solidFill>
-                        <a:srgbClr val="D5DDE8"/>
+                        <a:srgbClr val="D3E0F7"/>
                       </a:solidFill>
                       <a:prstDash val="solid"/>
                       <a:round/>
@@ -4787,7 +5303,7 @@
                     </a:lnR>
                     <a:lnT w="9525" cap="flat" cmpd="sng" algn="ctr">
                       <a:solidFill>
-                        <a:srgbClr val="D5DDE8"/>
+                        <a:srgbClr val="D3E0F7"/>
                       </a:solidFill>
                       <a:prstDash val="solid"/>
                       <a:round/>
@@ -4796,7 +5312,7 @@
                     </a:lnT>
                     <a:lnB w="9525" cap="flat" cmpd="sng" algn="ctr">
                       <a:solidFill>
-                        <a:srgbClr val="D5DDE8"/>
+                        <a:srgbClr val="D3E0F7"/>
                       </a:solidFill>
                       <a:prstDash val="solid"/>
                       <a:round/>
@@ -4804,7 +5320,7 @@
                       <a:tailEnd type="none" w="med" len="med"/>
                     </a:lnB>
                     <a:solidFill>
-                      <a:srgbClr val="F4F7FB"/>
+                      <a:srgbClr val="F3F7FE"/>
                     </a:solidFill>
                   </a:tcPr>
                 </a:tc>
@@ -4837,7 +5353,7 @@
                   <a:tcPr marL="109728" marR="109728" marT="109728" marB="109728" anchor="ctr">
                     <a:lnL w="9525" cap="flat" cmpd="sng" algn="ctr">
                       <a:solidFill>
-                        <a:srgbClr val="D5DDE8"/>
+                        <a:srgbClr val="D3E0F7"/>
                       </a:solidFill>
                       <a:prstDash val="solid"/>
                       <a:round/>
@@ -4846,7 +5362,7 @@
                     </a:lnL>
                     <a:lnR w="9525" cap="flat" cmpd="sng" algn="ctr">
                       <a:solidFill>
-                        <a:srgbClr val="D5DDE8"/>
+                        <a:srgbClr val="D3E0F7"/>
                       </a:solidFill>
                       <a:prstDash val="solid"/>
                       <a:round/>
@@ -4855,7 +5371,7 @@
                     </a:lnR>
                     <a:lnT w="9525" cap="flat" cmpd="sng" algn="ctr">
                       <a:solidFill>
-                        <a:srgbClr val="D5DDE8"/>
+                        <a:srgbClr val="D3E0F7"/>
                       </a:solidFill>
                       <a:prstDash val="solid"/>
                       <a:round/>
@@ -4864,7 +5380,7 @@
                     </a:lnT>
                     <a:lnB w="9525" cap="flat" cmpd="sng" algn="ctr">
                       <a:solidFill>
-                        <a:srgbClr val="D5DDE8"/>
+                        <a:srgbClr val="D3E0F7"/>
                       </a:solidFill>
                       <a:prstDash val="solid"/>
                       <a:round/>
@@ -4872,7 +5388,7 @@
                       <a:tailEnd type="none" w="med" len="med"/>
                     </a:lnB>
                     <a:solidFill>
-                      <a:srgbClr val="F4F7FB"/>
+                      <a:srgbClr val="F3F7FE"/>
                     </a:solidFill>
                   </a:tcPr>
                 </a:tc>
@@ -4959,6 +5475,118 @@
           </a:p>
         </p:txBody>
       </p:sp>
+      <p:sp>
+        <p:nvSpPr>
+          <p:cNvPr id="8" name="Rectangle 7"/>
+          <p:cNvSpPr/>
+          <p:nvPr/>
+        </p:nvSpPr>
+        <p:spPr>
+          <a:xfrm>
+            <a:off x="0" y="0"/>
+            <a:ext cx="12192000" cy="82296"/>
+          </a:xfrm>
+          <a:prstGeom prst="rect">
+            <a:avLst/>
+          </a:prstGeom>
+          <a:solidFill>
+            <a:srgbClr val="0B132B"/>
+          </a:solidFill>
+          <a:ln>
+            <a:noFill/>
+          </a:ln>
+          <a:effectLst/>
+        </p:spPr>
+        <p:style>
+          <a:lnRef idx="1">
+            <a:schemeClr val="accent1"/>
+          </a:lnRef>
+          <a:fillRef idx="3">
+            <a:schemeClr val="accent1"/>
+          </a:fillRef>
+          <a:effectRef idx="2">
+            <a:schemeClr val="accent1"/>
+          </a:effectRef>
+          <a:fontRef idx="minor">
+            <a:schemeClr val="lt1"/>
+          </a:fontRef>
+        </p:style>
+        <p:txBody>
+          <a:bodyPr rtlCol="0" anchor="ctr"/>
+          <a:lstStyle/>
+          <a:p>
+            <a:pPr algn="ctr"/>
+          </a:p>
+        </p:txBody>
+      </p:sp>
+      <p:sp>
+        <p:nvSpPr>
+          <p:cNvPr id="9" name="Rectangle 8"/>
+          <p:cNvSpPr/>
+          <p:nvPr/>
+        </p:nvSpPr>
+        <p:spPr>
+          <a:xfrm>
+            <a:off x="0" y="82296"/>
+            <a:ext cx="1463040" cy="45720"/>
+          </a:xfrm>
+          <a:prstGeom prst="rect">
+            <a:avLst/>
+          </a:prstGeom>
+          <a:solidFill>
+            <a:srgbClr val="2563EB"/>
+          </a:solidFill>
+          <a:ln>
+            <a:noFill/>
+          </a:ln>
+          <a:effectLst/>
+        </p:spPr>
+        <p:style>
+          <a:lnRef idx="1">
+            <a:schemeClr val="accent1"/>
+          </a:lnRef>
+          <a:fillRef idx="3">
+            <a:schemeClr val="accent1"/>
+          </a:fillRef>
+          <a:effectRef idx="2">
+            <a:schemeClr val="accent1"/>
+          </a:effectRef>
+          <a:fontRef idx="minor">
+            <a:schemeClr val="lt1"/>
+          </a:fontRef>
+        </p:style>
+        <p:txBody>
+          <a:bodyPr rtlCol="0" anchor="ctr"/>
+          <a:lstStyle/>
+          <a:p>
+            <a:pPr algn="ctr"/>
+          </a:p>
+        </p:txBody>
+      </p:sp>
+      <p:pic>
+        <p:nvPicPr>
+          <p:cNvPr id="10" name="Picture 9" descr="convva-primary.png"/>
+          <p:cNvPicPr>
+            <a:picLocks noChangeAspect="1"/>
+          </p:cNvPicPr>
+          <p:nvPr/>
+        </p:nvPicPr>
+        <p:blipFill>
+          <a:blip r:embed="rId3"/>
+          <a:stretch>
+            <a:fillRect/>
+          </a:stretch>
+        </p:blipFill>
+        <p:spPr>
+          <a:xfrm>
+            <a:off x="10363200" y="6383528"/>
+            <a:ext cx="1005839" cy="290576"/>
+          </a:xfrm>
+          <a:prstGeom prst="rect">
+            <a:avLst/>
+          </a:prstGeom>
+        </p:spPr>
+      </p:pic>
     </p:spTree>
   </p:cSld>
   <p:clrMapOvr>
@@ -5018,7 +5646,7 @@
             <a:r>
               <a:rPr lang="en-US" sz="2600" b="1" dirty="0">
                 <a:solidFill>
-                  <a:srgbClr val="15253D"/>
+                  <a:srgbClr val="0B132B"/>
                 </a:solidFill>
                 <a:latin typeface="Arial" pitchFamily="34" charset="0"/>
                 <a:ea typeface="Arial" pitchFamily="34" charset="-122"/>
@@ -5057,7 +5685,7 @@
             <a:r>
               <a:rPr lang="en-US" sz="1500" b="1" dirty="0">
                 <a:solidFill>
-                  <a:srgbClr val="0F766E"/>
+                  <a:srgbClr val="1D4ED8"/>
                 </a:solidFill>
                 <a:latin typeface="Arial" pitchFamily="34" charset="0"/>
                 <a:ea typeface="Arial" pitchFamily="34" charset="-122"/>
@@ -5202,7 +5830,7 @@
             <a:r>
               <a:rPr lang="en-US" sz="1500" b="1" dirty="0">
                 <a:solidFill>
-                  <a:srgbClr val="EA580C"/>
+                  <a:srgbClr val="2563EB"/>
                 </a:solidFill>
                 <a:latin typeface="Arial" pitchFamily="34" charset="0"/>
                 <a:ea typeface="Arial" pitchFamily="34" charset="-122"/>
@@ -5229,11 +5857,11 @@
             <a:avLst/>
           </a:prstGeom>
           <a:solidFill>
-            <a:srgbClr val="F4F7FB"/>
+            <a:srgbClr val="F3F7FE"/>
           </a:solidFill>
           <a:ln w="12700">
             <a:solidFill>
-              <a:srgbClr val="F4F7FB"/>
+              <a:srgbClr val="F3F7FE"/>
             </a:solidFill>
             <a:prstDash val="solid"/>
           </a:ln>
@@ -5373,11 +6001,11 @@
             <a:avLst/>
           </a:prstGeom>
           <a:solidFill>
-            <a:srgbClr val="F4F7FB"/>
+            <a:srgbClr val="F3F7FE"/>
           </a:solidFill>
           <a:ln w="12700">
             <a:solidFill>
-              <a:srgbClr val="F4F7FB"/>
+              <a:srgbClr val="F3F7FE"/>
             </a:solidFill>
             <a:prstDash val="solid"/>
           </a:ln>
@@ -5517,11 +6145,11 @@
             <a:avLst/>
           </a:prstGeom>
           <a:solidFill>
-            <a:srgbClr val="F4F7FB"/>
+            <a:srgbClr val="F3F7FE"/>
           </a:solidFill>
           <a:ln w="12700">
             <a:solidFill>
-              <a:srgbClr val="F4F7FB"/>
+              <a:srgbClr val="F3F7FE"/>
             </a:solidFill>
             <a:prstDash val="solid"/>
           </a:ln>
@@ -5661,11 +6289,11 @@
             <a:avLst/>
           </a:prstGeom>
           <a:solidFill>
-            <a:srgbClr val="F4F7FB"/>
+            <a:srgbClr val="F3F7FE"/>
           </a:solidFill>
           <a:ln w="12700">
             <a:solidFill>
-              <a:srgbClr val="F4F7FB"/>
+              <a:srgbClr val="F3F7FE"/>
             </a:solidFill>
             <a:prstDash val="solid"/>
           </a:ln>
@@ -5868,6 +6496,118 @@
           </a:p>
         </p:txBody>
       </p:sp>
+      <p:sp>
+        <p:nvSpPr>
+          <p:cNvPr id="24" name="Rectangle 23"/>
+          <p:cNvSpPr/>
+          <p:nvPr/>
+        </p:nvSpPr>
+        <p:spPr>
+          <a:xfrm>
+            <a:off x="0" y="0"/>
+            <a:ext cx="12192000" cy="82296"/>
+          </a:xfrm>
+          <a:prstGeom prst="rect">
+            <a:avLst/>
+          </a:prstGeom>
+          <a:solidFill>
+            <a:srgbClr val="0B132B"/>
+          </a:solidFill>
+          <a:ln>
+            <a:noFill/>
+          </a:ln>
+          <a:effectLst/>
+        </p:spPr>
+        <p:style>
+          <a:lnRef idx="1">
+            <a:schemeClr val="accent1"/>
+          </a:lnRef>
+          <a:fillRef idx="3">
+            <a:schemeClr val="accent1"/>
+          </a:fillRef>
+          <a:effectRef idx="2">
+            <a:schemeClr val="accent1"/>
+          </a:effectRef>
+          <a:fontRef idx="minor">
+            <a:schemeClr val="lt1"/>
+          </a:fontRef>
+        </p:style>
+        <p:txBody>
+          <a:bodyPr rtlCol="0" anchor="ctr"/>
+          <a:lstStyle/>
+          <a:p>
+            <a:pPr algn="ctr"/>
+          </a:p>
+        </p:txBody>
+      </p:sp>
+      <p:sp>
+        <p:nvSpPr>
+          <p:cNvPr id="25" name="Rectangle 24"/>
+          <p:cNvSpPr/>
+          <p:nvPr/>
+        </p:nvSpPr>
+        <p:spPr>
+          <a:xfrm>
+            <a:off x="0" y="82296"/>
+            <a:ext cx="1463040" cy="45720"/>
+          </a:xfrm>
+          <a:prstGeom prst="rect">
+            <a:avLst/>
+          </a:prstGeom>
+          <a:solidFill>
+            <a:srgbClr val="2563EB"/>
+          </a:solidFill>
+          <a:ln>
+            <a:noFill/>
+          </a:ln>
+          <a:effectLst/>
+        </p:spPr>
+        <p:style>
+          <a:lnRef idx="1">
+            <a:schemeClr val="accent1"/>
+          </a:lnRef>
+          <a:fillRef idx="3">
+            <a:schemeClr val="accent1"/>
+          </a:fillRef>
+          <a:effectRef idx="2">
+            <a:schemeClr val="accent1"/>
+          </a:effectRef>
+          <a:fontRef idx="minor">
+            <a:schemeClr val="lt1"/>
+          </a:fontRef>
+        </p:style>
+        <p:txBody>
+          <a:bodyPr rtlCol="0" anchor="ctr"/>
+          <a:lstStyle/>
+          <a:p>
+            <a:pPr algn="ctr"/>
+          </a:p>
+        </p:txBody>
+      </p:sp>
+      <p:pic>
+        <p:nvPicPr>
+          <p:cNvPr id="26" name="Picture 25" descr="convva-primary.png"/>
+          <p:cNvPicPr>
+            <a:picLocks noChangeAspect="1"/>
+          </p:cNvPicPr>
+          <p:nvPr/>
+        </p:nvPicPr>
+        <p:blipFill>
+          <a:blip r:embed="rId3"/>
+          <a:stretch>
+            <a:fillRect/>
+          </a:stretch>
+        </p:blipFill>
+        <p:spPr>
+          <a:xfrm>
+            <a:off x="10363200" y="6383528"/>
+            <a:ext cx="1005839" cy="290576"/>
+          </a:xfrm>
+          <a:prstGeom prst="rect">
+            <a:avLst/>
+          </a:prstGeom>
+        </p:spPr>
+      </p:pic>
     </p:spTree>
   </p:cSld>
   <p:clrMapOvr>

--- a/02-product-case-studies/convva-sme-commerce/Deck/Executive_Deck.pptx
+++ b/02-product-case-studies/convva-sme-commerce/Deck/Executive_Deck.pptx
@@ -1548,6 +1548,10 @@
             <a:prstDash val="solid"/>
           </a:ln>
         </p:spPr>
+        <p:txBody>
+          <a:bodyPr/>
+          <a:p/>
+        </p:txBody>
       </p:sp>
       <p:sp>
         <p:nvSpPr>
@@ -1676,7 +1680,7 @@
                 <a:ea typeface="Arial" pitchFamily="34" charset="-122"/>
                 <a:cs typeface="Arial" pitchFamily="34" charset="-120"/>
               </a:rPr>
-              <a:t>Founder and Product Business Analyst</a:t>
+              <a:t>Product Business Analyst</a:t>
             </a:r>
             <a:endParaRPr lang="en-US" sz="1400" dirty="0"/>
           </a:p>
@@ -1845,6 +1849,10 @@
             <a:prstDash val="solid"/>
           </a:ln>
         </p:spPr>
+        <p:txBody>
+          <a:bodyPr/>
+          <a:p/>
+        </p:txBody>
       </p:sp>
       <p:sp>
         <p:nvSpPr>
@@ -1987,6 +1995,10 @@
             <a:prstDash val="solid"/>
           </a:ln>
         </p:spPr>
+        <p:txBody>
+          <a:bodyPr/>
+          <a:p/>
+        </p:txBody>
       </p:sp>
       <p:sp>
         <p:nvSpPr>
@@ -2090,6 +2102,10 @@
             <a:prstDash val="solid"/>
           </a:ln>
         </p:spPr>
+        <p:txBody>
+          <a:bodyPr/>
+          <a:p/>
+        </p:txBody>
       </p:sp>
       <p:sp>
         <p:nvSpPr>
@@ -2193,6 +2209,10 @@
             <a:prstDash val="solid"/>
           </a:ln>
         </p:spPr>
+        <p:txBody>
+          <a:bodyPr/>
+          <a:p/>
+        </p:txBody>
       </p:sp>
       <p:sp>
         <p:nvSpPr>
@@ -5866,6 +5886,10 @@
             <a:prstDash val="solid"/>
           </a:ln>
         </p:spPr>
+        <p:txBody>
+          <a:bodyPr/>
+          <a:p/>
+        </p:txBody>
       </p:sp>
       <p:sp>
         <p:nvSpPr>
@@ -6010,6 +6034,10 @@
             <a:prstDash val="solid"/>
           </a:ln>
         </p:spPr>
+        <p:txBody>
+          <a:bodyPr/>
+          <a:p/>
+        </p:txBody>
       </p:sp>
       <p:sp>
         <p:nvSpPr>
@@ -6154,6 +6182,10 @@
             <a:prstDash val="solid"/>
           </a:ln>
         </p:spPr>
+        <p:txBody>
+          <a:bodyPr/>
+          <a:p/>
+        </p:txBody>
       </p:sp>
       <p:sp>
         <p:nvSpPr>
@@ -6298,6 +6330,10 @@
             <a:prstDash val="solid"/>
           </a:ln>
         </p:spPr>
+        <p:txBody>
+          <a:bodyPr/>
+          <a:p/>
+        </p:txBody>
       </p:sp>
       <p:sp>
         <p:nvSpPr>
